--- a/Submission/processed_Matrix-Factorization-and-Latent-Embeddings-via-SVD-for-Recommendation.pptx
+++ b/Submission/processed_Matrix-Factorization-and-Latent-Embeddings-via-SVD-for-Recommendation.pptx
@@ -25,15 +25,15 @@
   <p:notesSz cx="8229600" cy="14630400"/>
   <p:embeddedFontLst>
     <p:embeddedFont>
-      <p:font typeface="Raleway" pitchFamily="2" charset="0"/>
+      <p:font typeface="Raleway" panose="020F0502020204030204" pitchFamily="2" charset="0"/>
       <p:regular r:id="rId15"/>
     </p:embeddedFont>
     <p:embeddedFont>
-      <p:font typeface="Raleway Light" pitchFamily="2" charset="0"/>
+      <p:font typeface="Raleway Light" panose="020F0502020204030204" pitchFamily="2" charset="0"/>
       <p:regular r:id="rId16"/>
     </p:embeddedFont>
     <p:embeddedFont>
-      <p:font typeface="Roboto" panose="02000000000000000000" pitchFamily="2" charset="0"/>
+      <p:font typeface="Roboto" panose="020F0502020204030204" pitchFamily="2" charset="0"/>
       <p:regular r:id="rId17"/>
     </p:embeddedFont>
   </p:embeddedFontLst>
@@ -1607,6 +1607,13 @@
           </a:solidFill>
           <a:ln/>
         </p:spPr>
+        <p:txBody>
+          <a:bodyPr/>
+          <a:lstStyle/>
+          <a:p>
+            <a:endParaRPr lang="en-US"/>
+          </a:p>
+        </p:txBody>
       </p:sp>
       <p:sp>
         <p:nvSpPr>
@@ -1629,6 +1636,13 @@
           </a:solidFill>
           <a:ln/>
         </p:spPr>
+        <p:txBody>
+          <a:bodyPr/>
+          <a:lstStyle/>
+          <a:p>
+            <a:endParaRPr lang="en-US"/>
+          </a:p>
+        </p:txBody>
       </p:sp>
     </p:spTree>
   </p:cSld>
@@ -1674,6 +1688,13 @@
           </a:solidFill>
           <a:ln/>
         </p:spPr>
+        <p:txBody>
+          <a:bodyPr/>
+          <a:lstStyle/>
+          <a:p>
+            <a:endParaRPr lang="en-US"/>
+          </a:p>
+        </p:txBody>
       </p:sp>
       <p:sp>
         <p:nvSpPr>
@@ -1696,6 +1717,13 @@
           </a:solidFill>
           <a:ln/>
         </p:spPr>
+        <p:txBody>
+          <a:bodyPr/>
+          <a:lstStyle/>
+          <a:p>
+            <a:endParaRPr lang="en-US"/>
+          </a:p>
+        </p:txBody>
       </p:sp>
     </p:spTree>
   </p:cSld>
@@ -1741,6 +1769,13 @@
           </a:solidFill>
           <a:ln/>
         </p:spPr>
+        <p:txBody>
+          <a:bodyPr/>
+          <a:lstStyle/>
+          <a:p>
+            <a:endParaRPr lang="en-US"/>
+          </a:p>
+        </p:txBody>
       </p:sp>
       <p:sp>
         <p:nvSpPr>
@@ -1763,6 +1798,13 @@
           </a:solidFill>
           <a:ln/>
         </p:spPr>
+        <p:txBody>
+          <a:bodyPr/>
+          <a:lstStyle/>
+          <a:p>
+            <a:endParaRPr lang="en-US"/>
+          </a:p>
+        </p:txBody>
       </p:sp>
     </p:spTree>
   </p:cSld>
@@ -1808,6 +1850,13 @@
           </a:solidFill>
           <a:ln/>
         </p:spPr>
+        <p:txBody>
+          <a:bodyPr/>
+          <a:lstStyle/>
+          <a:p>
+            <a:endParaRPr lang="en-US"/>
+          </a:p>
+        </p:txBody>
       </p:sp>
       <p:sp>
         <p:nvSpPr>
@@ -1830,6 +1879,13 @@
           </a:solidFill>
           <a:ln/>
         </p:spPr>
+        <p:txBody>
+          <a:bodyPr/>
+          <a:lstStyle/>
+          <a:p>
+            <a:endParaRPr lang="en-US"/>
+          </a:p>
+        </p:txBody>
       </p:sp>
     </p:spTree>
   </p:cSld>
@@ -2585,6 +2641,13 @@
           </a:solidFill>
           <a:ln/>
         </p:spPr>
+        <p:txBody>
+          <a:bodyPr/>
+          <a:lstStyle/>
+          <a:p>
+            <a:endParaRPr lang="en-US"/>
+          </a:p>
+        </p:txBody>
       </p:sp>
       <p:sp>
         <p:nvSpPr>
@@ -2652,6 +2715,13 @@
             <a:prstDash val="solid"/>
           </a:ln>
         </p:spPr>
+        <p:txBody>
+          <a:bodyPr/>
+          <a:lstStyle/>
+          <a:p>
+            <a:endParaRPr lang="en-US"/>
+          </a:p>
+        </p:txBody>
       </p:sp>
       <p:sp>
         <p:nvSpPr>
@@ -2719,6 +2789,13 @@
             <a:prstDash val="solid"/>
           </a:ln>
         </p:spPr>
+        <p:txBody>
+          <a:bodyPr/>
+          <a:lstStyle/>
+          <a:p>
+            <a:endParaRPr lang="en-US"/>
+          </a:p>
+        </p:txBody>
       </p:sp>
       <p:sp>
         <p:nvSpPr>
@@ -2786,6 +2863,13 @@
             <a:prstDash val="solid"/>
           </a:ln>
         </p:spPr>
+        <p:txBody>
+          <a:bodyPr/>
+          <a:lstStyle/>
+          <a:p>
+            <a:endParaRPr lang="en-US"/>
+          </a:p>
+        </p:txBody>
       </p:sp>
       <p:sp>
         <p:nvSpPr>
@@ -3215,6 +3299,13 @@
           </a:solidFill>
           <a:ln/>
         </p:spPr>
+        <p:txBody>
+          <a:bodyPr/>
+          <a:lstStyle/>
+          <a:p>
+            <a:endParaRPr lang="en-US"/>
+          </a:p>
+        </p:txBody>
       </p:sp>
       <p:pic>
         <p:nvPicPr>
@@ -3590,6 +3681,13 @@
           </a:solidFill>
           <a:ln/>
         </p:spPr>
+        <p:txBody>
+          <a:bodyPr/>
+          <a:lstStyle/>
+          <a:p>
+            <a:endParaRPr lang="en-US"/>
+          </a:p>
+        </p:txBody>
       </p:sp>
       <p:sp>
         <p:nvSpPr>
@@ -3756,6 +3854,13 @@
             <a:prstDash val="solid"/>
           </a:ln>
         </p:spPr>
+        <p:txBody>
+          <a:bodyPr/>
+          <a:lstStyle/>
+          <a:p>
+            <a:endParaRPr lang="en-US"/>
+          </a:p>
+        </p:txBody>
       </p:sp>
       <p:sp>
         <p:nvSpPr>
@@ -3778,6 +3883,13 @@
           </a:solidFill>
           <a:ln/>
         </p:spPr>
+        <p:txBody>
+          <a:bodyPr/>
+          <a:lstStyle/>
+          <a:p>
+            <a:endParaRPr lang="en-US"/>
+          </a:p>
+        </p:txBody>
       </p:sp>
       <p:sp>
         <p:nvSpPr>
@@ -3879,7 +3991,7 @@
                 <a:ea typeface="Roboto" pitchFamily="34" charset="-122"/>
                 <a:cs typeface="Roboto" pitchFamily="34" charset="-120"/>
               </a:rPr>
-              <a:t>50 dimensions</a:t>
+              <a:t>64 dimensions</a:t>
             </a:r>
             <a:r>
               <a:rPr lang="en-US" sz="850" dirty="0">
@@ -3924,6 +4036,13 @@
             <a:prstDash val="solid"/>
           </a:ln>
         </p:spPr>
+        <p:txBody>
+          <a:bodyPr/>
+          <a:lstStyle/>
+          <a:p>
+            <a:endParaRPr lang="en-US"/>
+          </a:p>
+        </p:txBody>
       </p:sp>
       <p:sp>
         <p:nvSpPr>
@@ -3946,6 +4065,13 @@
           </a:solidFill>
           <a:ln/>
         </p:spPr>
+        <p:txBody>
+          <a:bodyPr/>
+          <a:lstStyle/>
+          <a:p>
+            <a:endParaRPr lang="en-US"/>
+          </a:p>
+        </p:txBody>
       </p:sp>
       <p:sp>
         <p:nvSpPr>
@@ -4114,6 +4240,13 @@
             <a:prstDash val="solid"/>
           </a:ln>
         </p:spPr>
+        <p:txBody>
+          <a:bodyPr/>
+          <a:lstStyle/>
+          <a:p>
+            <a:endParaRPr lang="en-US"/>
+          </a:p>
+        </p:txBody>
       </p:sp>
       <p:sp>
         <p:nvSpPr>
@@ -4136,6 +4269,13 @@
           </a:solidFill>
           <a:ln/>
         </p:spPr>
+        <p:txBody>
+          <a:bodyPr/>
+          <a:lstStyle/>
+          <a:p>
+            <a:endParaRPr lang="en-US"/>
+          </a:p>
+        </p:txBody>
       </p:sp>
       <p:sp>
         <p:nvSpPr>
@@ -4277,6 +4417,13 @@
           </a:solidFill>
           <a:ln/>
         </p:spPr>
+        <p:txBody>
+          <a:bodyPr/>
+          <a:lstStyle/>
+          <a:p>
+            <a:endParaRPr lang="en-US"/>
+          </a:p>
+        </p:txBody>
       </p:sp>
       <p:sp>
         <p:nvSpPr>
@@ -4423,6 +4570,13 @@
           </a:solidFill>
           <a:ln/>
         </p:spPr>
+        <p:txBody>
+          <a:bodyPr/>
+          <a:lstStyle/>
+          <a:p>
+            <a:endParaRPr lang="en-US"/>
+          </a:p>
+        </p:txBody>
       </p:sp>
       <p:sp>
         <p:nvSpPr>
@@ -4445,6 +4599,13 @@
           </a:solidFill>
           <a:ln/>
         </p:spPr>
+        <p:txBody>
+          <a:bodyPr/>
+          <a:lstStyle/>
+          <a:p>
+            <a:endParaRPr lang="en-US"/>
+          </a:p>
+        </p:txBody>
       </p:sp>
       <p:pic>
         <p:nvPicPr>
@@ -4898,6 +5059,13 @@
           </a:solidFill>
           <a:ln/>
         </p:spPr>
+        <p:txBody>
+          <a:bodyPr/>
+          <a:lstStyle/>
+          <a:p>
+            <a:endParaRPr lang="en-US"/>
+          </a:p>
+        </p:txBody>
       </p:sp>
       <p:sp>
         <p:nvSpPr>
@@ -5062,6 +5230,13 @@
             <a:prstDash val="solid"/>
           </a:ln>
         </p:spPr>
+        <p:txBody>
+          <a:bodyPr/>
+          <a:lstStyle/>
+          <a:p>
+            <a:endParaRPr lang="en-US"/>
+          </a:p>
+        </p:txBody>
       </p:sp>
       <p:sp>
         <p:nvSpPr>
@@ -5195,6 +5370,13 @@
             <a:prstDash val="solid"/>
           </a:ln>
         </p:spPr>
+        <p:txBody>
+          <a:bodyPr/>
+          <a:lstStyle/>
+          <a:p>
+            <a:endParaRPr lang="en-US"/>
+          </a:p>
+        </p:txBody>
       </p:sp>
       <p:sp>
         <p:nvSpPr>
@@ -5339,6 +5521,13 @@
             <a:prstDash val="solid"/>
           </a:ln>
         </p:spPr>
+        <p:txBody>
+          <a:bodyPr/>
+          <a:lstStyle/>
+          <a:p>
+            <a:endParaRPr lang="en-US"/>
+          </a:p>
+        </p:txBody>
       </p:sp>
       <p:sp>
         <p:nvSpPr>
@@ -5573,6 +5762,13 @@
           </a:solidFill>
           <a:ln/>
         </p:spPr>
+        <p:txBody>
+          <a:bodyPr/>
+          <a:lstStyle/>
+          <a:p>
+            <a:endParaRPr lang="en-US"/>
+          </a:p>
+        </p:txBody>
       </p:sp>
       <p:pic>
         <p:nvPicPr>
@@ -5743,6 +5939,13 @@
           </a:solidFill>
           <a:ln/>
         </p:spPr>
+        <p:txBody>
+          <a:bodyPr/>
+          <a:lstStyle/>
+          <a:p>
+            <a:endParaRPr lang="en-US"/>
+          </a:p>
+        </p:txBody>
       </p:sp>
       <p:sp>
         <p:nvSpPr>
@@ -5889,6 +6092,13 @@
           </a:solidFill>
           <a:ln/>
         </p:spPr>
+        <p:txBody>
+          <a:bodyPr/>
+          <a:lstStyle/>
+          <a:p>
+            <a:endParaRPr lang="en-US"/>
+          </a:p>
+        </p:txBody>
       </p:sp>
       <p:sp>
         <p:nvSpPr>
@@ -6035,6 +6245,13 @@
           </a:solidFill>
           <a:ln/>
         </p:spPr>
+        <p:txBody>
+          <a:bodyPr/>
+          <a:lstStyle/>
+          <a:p>
+            <a:endParaRPr lang="en-US"/>
+          </a:p>
+        </p:txBody>
       </p:sp>
       <p:sp>
         <p:nvSpPr>
@@ -6274,6 +6491,13 @@
           </a:solidFill>
           <a:ln/>
         </p:spPr>
+        <p:txBody>
+          <a:bodyPr/>
+          <a:lstStyle/>
+          <a:p>
+            <a:endParaRPr lang="en-US"/>
+          </a:p>
+        </p:txBody>
       </p:sp>
       <p:sp>
         <p:nvSpPr>
@@ -6636,6 +6860,13 @@
           </a:solidFill>
           <a:ln/>
         </p:spPr>
+        <p:txBody>
+          <a:bodyPr/>
+          <a:lstStyle/>
+          <a:p>
+            <a:endParaRPr lang="en-US"/>
+          </a:p>
+        </p:txBody>
       </p:sp>
       <p:pic>
         <p:nvPicPr>
@@ -6963,6 +7194,13 @@
           </a:solidFill>
           <a:ln/>
         </p:spPr>
+        <p:txBody>
+          <a:bodyPr/>
+          <a:lstStyle/>
+          <a:p>
+            <a:endParaRPr lang="en-US"/>
+          </a:p>
+        </p:txBody>
       </p:sp>
       <p:pic>
         <p:nvPicPr>
@@ -7336,6 +7574,13 @@
           </a:solidFill>
           <a:ln/>
         </p:spPr>
+        <p:txBody>
+          <a:bodyPr/>
+          <a:lstStyle/>
+          <a:p>
+            <a:endParaRPr lang="en-US"/>
+          </a:p>
+        </p:txBody>
       </p:sp>
       <p:pic>
         <p:nvPicPr>
@@ -7493,6 +7738,13 @@
             <a:prstDash val="solid"/>
           </a:ln>
         </p:spPr>
+        <p:txBody>
+          <a:bodyPr/>
+          <a:lstStyle/>
+          <a:p>
+            <a:endParaRPr lang="en-US"/>
+          </a:p>
+        </p:txBody>
       </p:sp>
       <p:sp>
         <p:nvSpPr>
@@ -7646,6 +7898,13 @@
             <a:prstDash val="solid"/>
           </a:ln>
         </p:spPr>
+        <p:txBody>
+          <a:bodyPr/>
+          <a:lstStyle/>
+          <a:p>
+            <a:endParaRPr lang="en-US"/>
+          </a:p>
+        </p:txBody>
       </p:sp>
       <p:sp>
         <p:nvSpPr>
@@ -8241,7 +8500,7 @@
                 <a:ea typeface="Roboto" pitchFamily="34" charset="-122"/>
                 <a:cs typeface="Roboto" pitchFamily="34" charset="-120"/>
               </a:rPr>
-              <a:t>k = 50 dense orthogonal latent dimensions</a:t>
+              <a:t>k = 64 dense orthogonal latent dimensions</a:t>
             </a:r>
             <a:r>
               <a:rPr lang="en-US" sz="1150" dirty="0">
@@ -8252,7 +8511,7 @@
                 <a:ea typeface="Roboto" pitchFamily="34" charset="-122"/>
                 <a:cs typeface="Roboto" pitchFamily="34" charset="-120"/>
               </a:rPr>
-              <a:t>, encoding hidden user taste patterns and hidden movie characteristics simultaneously. By operating in latent space rather than raw rating space, SVD naturally escapes the popularity trap and surfaces obscure, long-tail content — acting as an AI "smoothing" function that infers relationships even for movies with near-zero interaction history.</a:t>
+              <a:t>, encoding hidden patterns inside the dataset. By operating in latent space rather than raw rating space, SVD naturally escapes the popularity trap and surfaces obscure, long-tail content — acting as an AI "smoothing" function that infers relationships even for movies with near-zero interaction history.</a:t>
             </a:r>
             <a:endParaRPr lang="en-US" sz="1150" dirty="0"/>
           </a:p>
@@ -8993,6 +9252,13 @@
           </a:solidFill>
           <a:ln/>
         </p:spPr>
+        <p:txBody>
+          <a:bodyPr/>
+          <a:lstStyle/>
+          <a:p>
+            <a:endParaRPr lang="en-US"/>
+          </a:p>
+        </p:txBody>
       </p:sp>
       <p:pic>
         <p:nvPicPr>
@@ -9477,7 +9743,7 @@
                 <a:ea typeface="Roboto" pitchFamily="34" charset="-122"/>
                 <a:cs typeface="Roboto" pitchFamily="34" charset="-120"/>
               </a:rPr>
-              <a:t>Raw 50-dimensional latent vectors are </a:t>
+              <a:t>Raw 64-dimensional latent vectors are </a:t>
             </a:r>
             <a:r>
               <a:rPr lang="en-US" sz="1350" b="1" dirty="0">
@@ -9632,6 +9898,13 @@
           </a:solidFill>
           <a:ln/>
         </p:spPr>
+        <p:txBody>
+          <a:bodyPr/>
+          <a:lstStyle/>
+          <a:p>
+            <a:endParaRPr lang="en-US"/>
+          </a:p>
+        </p:txBody>
       </p:sp>
       <p:pic>
         <p:nvPicPr>
@@ -9959,6 +10232,13 @@
             <a:prstDash val="solid"/>
           </a:ln>
         </p:spPr>
+        <p:txBody>
+          <a:bodyPr/>
+          <a:lstStyle/>
+          <a:p>
+            <a:endParaRPr lang="en-US"/>
+          </a:p>
+        </p:txBody>
       </p:sp>
       <p:sp>
         <p:nvSpPr>
@@ -9981,6 +10261,13 @@
           </a:solidFill>
           <a:ln/>
         </p:spPr>
+        <p:txBody>
+          <a:bodyPr/>
+          <a:lstStyle/>
+          <a:p>
+            <a:endParaRPr lang="en-US"/>
+          </a:p>
+        </p:txBody>
       </p:sp>
       <p:sp>
         <p:nvSpPr>
@@ -10127,6 +10414,13 @@
             <a:prstDash val="solid"/>
           </a:ln>
         </p:spPr>
+        <p:txBody>
+          <a:bodyPr/>
+          <a:lstStyle/>
+          <a:p>
+            <a:endParaRPr lang="en-US"/>
+          </a:p>
+        </p:txBody>
       </p:sp>
       <p:sp>
         <p:nvSpPr>
@@ -10149,6 +10443,13 @@
           </a:solidFill>
           <a:ln/>
         </p:spPr>
+        <p:txBody>
+          <a:bodyPr/>
+          <a:lstStyle/>
+          <a:p>
+            <a:endParaRPr lang="en-US"/>
+          </a:p>
+        </p:txBody>
       </p:sp>
       <p:sp>
         <p:nvSpPr>
@@ -10295,6 +10596,13 @@
             <a:prstDash val="solid"/>
           </a:ln>
         </p:spPr>
+        <p:txBody>
+          <a:bodyPr/>
+          <a:lstStyle/>
+          <a:p>
+            <a:endParaRPr lang="en-US"/>
+          </a:p>
+        </p:txBody>
       </p:sp>
       <p:sp>
         <p:nvSpPr>
@@ -10317,6 +10625,13 @@
           </a:solidFill>
           <a:ln/>
         </p:spPr>
+        <p:txBody>
+          <a:bodyPr/>
+          <a:lstStyle/>
+          <a:p>
+            <a:endParaRPr lang="en-US"/>
+          </a:p>
+        </p:txBody>
       </p:sp>
       <p:sp>
         <p:nvSpPr>
@@ -10463,6 +10778,13 @@
             <a:prstDash val="solid"/>
           </a:ln>
         </p:spPr>
+        <p:txBody>
+          <a:bodyPr/>
+          <a:lstStyle/>
+          <a:p>
+            <a:endParaRPr lang="en-US"/>
+          </a:p>
+        </p:txBody>
       </p:sp>
       <p:sp>
         <p:nvSpPr>
@@ -10485,6 +10807,13 @@
           </a:solidFill>
           <a:ln/>
         </p:spPr>
+        <p:txBody>
+          <a:bodyPr/>
+          <a:lstStyle/>
+          <a:p>
+            <a:endParaRPr lang="en-US"/>
+          </a:p>
+        </p:txBody>
       </p:sp>
       <p:sp>
         <p:nvSpPr>
